--- a/deck/InfinitePossibilities-PortCo-AI.pptx
+++ b/deck/InfinitePossibilities-PortCo-AI.pptx
@@ -9834,7 +9834,7 @@
                 <a:ea typeface="Century Gothic" pitchFamily="34" charset="-122"/>
                 <a:cs typeface="Century Gothic" pitchFamily="34" charset="-120"/>
               </a:rPr>
-              <a:t>We build these strategic assets for portfolio companies</a:t>
+              <a:t>We build these strategic AI assets for portfolio companies</a:t>
             </a:r>
             <a:endParaRPr lang="en-US" sz="2700" dirty="0"/>
           </a:p>
@@ -10573,7 +10573,7 @@
                 <a:ea typeface="Century Gothic" pitchFamily="34" charset="-122"/>
                 <a:cs typeface="Century Gothic" pitchFamily="34" charset="-120"/>
               </a:rPr>
-              <a:t>The architecture of a strategic AI asset</a:t>
+              <a:t>Strategic AI platform: what are we building?</a:t>
             </a:r>
             <a:endParaRPr lang="en-US" sz="2700" dirty="0"/>
           </a:p>
